--- a/docs/content/pca/pca_lecture.pptx
+++ b/docs/content/pca/pca_lecture.pptx
@@ -7614,7 +7614,7 @@
       </p:sp>
       <p:pic>
         <p:nvPicPr>
-          <p:cNvPr descr="pca_lecture_files/figure-pptx/correaltions-1.png" id="0" name="Picture 1"/>
+          <p:cNvPr descr="pca_lecture_files/figure-pptx/pca-01-1.png" id="0" name="Picture 1"/>
           <p:cNvPicPr>
             <a:picLocks noGrp="1" noChangeAspect="1"/>
           </p:cNvPicPr>
